--- a/DJ_Talim/Day 15/बन्दीप्रत्यक्षीकरण तथा निषेधाज्ञाको अन्तिम आदेश लेखन अभ्यास मा श्री श्यामकुमार भट्टराई/आदेश लेखन २०८२ माघ १५ गते.pptx
+++ b/DJ_Talim/Day 15/बन्दीप्रत्यक्षीकरण तथा निषेधाज्ञाको अन्तिम आदेश लेखन अभ्यास मा श्री श्यामकुमार भट्टराई/आदेश लेखन २०८२ माघ १५ गते.pptx
@@ -130,6 +130,22 @@
       </a:defRPr>
     </a:lvl9pPr>
   </p:defaultTextStyle>
+  <p:extLst>
+    <p:ext uri="{EFAFB233-063F-42B5-8137-9DF3F51BA10A}">
+      <p15:sldGuideLst xmlns:p15="http://schemas.microsoft.com/office/powerpoint/2012/main">
+        <p15:guide id="1" orient="horz" pos="2160">
+          <p15:clr>
+            <a:srgbClr val="A4A3A4"/>
+          </p15:clr>
+        </p15:guide>
+        <p15:guide id="2" pos="2880">
+          <p15:clr>
+            <a:srgbClr val="A4A3A4"/>
+          </p15:clr>
+        </p15:guide>
+      </p15:sldGuideLst>
+    </p:ext>
+  </p:extLst>
 </p:presentation>
 </file>
 
@@ -315,7 +331,7 @@
             <a:fld id="{1D8BD707-D9CF-40AE-B4C6-C98DA3205C09}" type="datetimeFigureOut">
               <a:rPr lang="en-US" smtClean="0"/>
               <a:pPr/>
-              <a:t>2/1/2026</a:t>
+              <a:t>4/18/2026</a:t>
             </a:fld>
             <a:endParaRPr lang="en-US"/>
           </a:p>
@@ -482,7 +498,7 @@
             <a:fld id="{1D8BD707-D9CF-40AE-B4C6-C98DA3205C09}" type="datetimeFigureOut">
               <a:rPr lang="en-US" smtClean="0"/>
               <a:pPr/>
-              <a:t>2/1/2026</a:t>
+              <a:t>4/18/2026</a:t>
             </a:fld>
             <a:endParaRPr lang="en-US"/>
           </a:p>
@@ -659,7 +675,7 @@
             <a:fld id="{1D8BD707-D9CF-40AE-B4C6-C98DA3205C09}" type="datetimeFigureOut">
               <a:rPr lang="en-US" smtClean="0"/>
               <a:pPr/>
-              <a:t>2/1/2026</a:t>
+              <a:t>4/18/2026</a:t>
             </a:fld>
             <a:endParaRPr lang="en-US"/>
           </a:p>
@@ -826,7 +842,7 @@
             <a:fld id="{1D8BD707-D9CF-40AE-B4C6-C98DA3205C09}" type="datetimeFigureOut">
               <a:rPr lang="en-US" smtClean="0"/>
               <a:pPr/>
-              <a:t>2/1/2026</a:t>
+              <a:t>4/18/2026</a:t>
             </a:fld>
             <a:endParaRPr lang="en-US"/>
           </a:p>
@@ -1069,7 +1085,7 @@
             <a:fld id="{1D8BD707-D9CF-40AE-B4C6-C98DA3205C09}" type="datetimeFigureOut">
               <a:rPr lang="en-US" smtClean="0"/>
               <a:pPr/>
-              <a:t>2/1/2026</a:t>
+              <a:t>4/18/2026</a:t>
             </a:fld>
             <a:endParaRPr lang="en-US"/>
           </a:p>
@@ -1354,7 +1370,7 @@
             <a:fld id="{1D8BD707-D9CF-40AE-B4C6-C98DA3205C09}" type="datetimeFigureOut">
               <a:rPr lang="en-US" smtClean="0"/>
               <a:pPr/>
-              <a:t>2/1/2026</a:t>
+              <a:t>4/18/2026</a:t>
             </a:fld>
             <a:endParaRPr lang="en-US"/>
           </a:p>
@@ -1773,7 +1789,7 @@
             <a:fld id="{1D8BD707-D9CF-40AE-B4C6-C98DA3205C09}" type="datetimeFigureOut">
               <a:rPr lang="en-US" smtClean="0"/>
               <a:pPr/>
-              <a:t>2/1/2026</a:t>
+              <a:t>4/18/2026</a:t>
             </a:fld>
             <a:endParaRPr lang="en-US"/>
           </a:p>
@@ -1888,7 +1904,7 @@
             <a:fld id="{1D8BD707-D9CF-40AE-B4C6-C98DA3205C09}" type="datetimeFigureOut">
               <a:rPr lang="en-US" smtClean="0"/>
               <a:pPr/>
-              <a:t>2/1/2026</a:t>
+              <a:t>4/18/2026</a:t>
             </a:fld>
             <a:endParaRPr lang="en-US"/>
           </a:p>
@@ -1980,7 +1996,7 @@
             <a:fld id="{1D8BD707-D9CF-40AE-B4C6-C98DA3205C09}" type="datetimeFigureOut">
               <a:rPr lang="en-US" smtClean="0"/>
               <a:pPr/>
-              <a:t>2/1/2026</a:t>
+              <a:t>4/18/2026</a:t>
             </a:fld>
             <a:endParaRPr lang="en-US"/>
           </a:p>
@@ -2254,7 +2270,7 @@
             <a:fld id="{1D8BD707-D9CF-40AE-B4C6-C98DA3205C09}" type="datetimeFigureOut">
               <a:rPr lang="en-US" smtClean="0"/>
               <a:pPr/>
-              <a:t>2/1/2026</a:t>
+              <a:t>4/18/2026</a:t>
             </a:fld>
             <a:endParaRPr lang="en-US"/>
           </a:p>
@@ -2504,7 +2520,7 @@
             <a:fld id="{1D8BD707-D9CF-40AE-B4C6-C98DA3205C09}" type="datetimeFigureOut">
               <a:rPr lang="en-US" smtClean="0"/>
               <a:pPr/>
-              <a:t>2/1/2026</a:t>
+              <a:t>4/18/2026</a:t>
             </a:fld>
             <a:endParaRPr lang="en-US"/>
           </a:p>
@@ -2714,7 +2730,7 @@
             <a:fld id="{1D8BD707-D9CF-40AE-B4C6-C98DA3205C09}" type="datetimeFigureOut">
               <a:rPr lang="en-US" smtClean="0"/>
               <a:pPr/>
-              <a:t>2/1/2026</a:t>
+              <a:t>4/18/2026</a:t>
             </a:fld>
             <a:endParaRPr lang="en-US"/>
           </a:p>
@@ -3446,7 +3462,7 @@
         <p:spPr/>
         <p:txBody>
           <a:bodyPr>
-            <a:normAutofit fontScale="92500" lnSpcReduction="20000"/>
+            <a:normAutofit fontScale="92500" lnSpcReduction="10000"/>
           </a:bodyPr>
           <a:lstStyle/>
           <a:p>
@@ -3468,15 +3484,7 @@
             </a:r>
             <a:r>
               <a:rPr lang="ne-NP" dirty="0" smtClean="0"/>
-              <a:t> आदेश जारी गर्नु नपर्ने कुनै आधार कारण भए यो आदेश प्राप्त गरेको मितिले १५ दिनभित्र विपक्षी नं ४ ५ ६ ७ ले मुख्य न्यायाधिवक्ताको कार्यालय मधेश प्रदेश मार्फत र अन्य विपक्षीहरुले आफै वा कानून बमोजिमको प्रतिनिधि मार्फत लिखित जवाफ पेश गर्नु भनी विपक्षीहरुका नाममा </a:t>
-            </a:r>
-            <a:r>
-              <a:rPr lang="ne-NP" dirty="0" smtClean="0"/>
-              <a:t>निवेदन पत्र र प्रस्तुत आदेशको प्रतिलिपिसहित म्याद </a:t>
-            </a:r>
-            <a:r>
-              <a:rPr lang="ne-NP" dirty="0" smtClean="0"/>
-              <a:t>सूचना जारी गरी लिखित जवाफ परे वा अवधि नाँघेपछि नियमानुसार पेश गर्नू।</a:t>
+              <a:t> आदेश जारी गर्नु नपर्ने कुनै आधार कारण भए यो आदेश प्राप्त गरेको मितिले १५ दिनभित्र विपक्षी नं ४ ५ ६ ७ ले मुख्य न्यायाधिवक्ताको कार्यालय मधेश प्रदेश मार्फत र अन्य विपक्षीहरुले आफै वा कानून बमोजिमको प्रतिनिधि मार्फत लिखित जवाफ पेश गर्नु भनी विपक्षीहरुका नाममा निवेदन पत्र र प्रस्तुत आदेशको प्रतिलिपिसहित म्याद सूचना जारी गरी लिखित जवाफ परे वा अवधि नाँघेपछि नियमानुसार पेश गर्नू।</a:t>
             </a:r>
             <a:endParaRPr lang="en-US" dirty="0"/>
           </a:p>
@@ -3548,7 +3556,7 @@
         <p:spPr/>
         <p:txBody>
           <a:bodyPr>
-            <a:normAutofit lnSpcReduction="10000"/>
+            <a:normAutofit/>
           </a:bodyPr>
           <a:lstStyle/>
           <a:p>
@@ -3602,11 +3610,7 @@
             </a:r>
             <a:r>
               <a:rPr lang="ne-NP" dirty="0"/>
-              <a:t>निवेदन पत्र र प्रस्तुत आदेशको प्रतिलिपिसहित म्याद </a:t>
-            </a:r>
-            <a:r>
-              <a:rPr lang="ne-NP" dirty="0"/>
-              <a:t>सूचना जारी गरी लिखित जवाफ परे वा अवधि नाँघेपछि नियमानुसार पेश गर्नू।</a:t>
+              <a:t>निवेदन पत्र र प्रस्तुत आदेशको प्रतिलिपिसहित म्याद सूचना जारी गरी लिखित जवाफ परे वा अवधि नाँघेपछि नियमानुसार पेश गर्नू।</a:t>
             </a:r>
             <a:endParaRPr lang="en-US" dirty="0"/>
           </a:p>
@@ -3681,7 +3685,7 @@
         <p:spPr/>
         <p:txBody>
           <a:bodyPr>
-            <a:normAutofit fontScale="92500" lnSpcReduction="20000"/>
+            <a:normAutofit fontScale="92500" lnSpcReduction="10000"/>
           </a:bodyPr>
           <a:lstStyle/>
           <a:p>
@@ -3719,15 +3723,7 @@
             </a:r>
             <a:r>
               <a:rPr lang="ne-NP" dirty="0"/>
-              <a:t>र अन्य विपक्षीहरुले आफै वा कानून बमोजिमको प्रतिनिधि मार्फत लिखित जवाफ पेश गर्नु भनी विपक्षीहरुका नाममा </a:t>
-            </a:r>
-            <a:r>
-              <a:rPr lang="ne-NP" dirty="0"/>
-              <a:t>निवेदन पत्र र प्रस्तुत आदेशको प्रतिलिपिसहित म्याद </a:t>
-            </a:r>
-            <a:r>
-              <a:rPr lang="ne-NP" dirty="0"/>
-              <a:t>सूचना जारी गरी लिखित जवाफ परे वा अवधि नाँघेपछि नियमानुसार पेश गर्नू।</a:t>
+              <a:t>र अन्य विपक्षीहरुले आफै वा कानून बमोजिमको प्रतिनिधि मार्फत लिखित जवाफ पेश गर्नु भनी विपक्षीहरुका नाममा निवेदन पत्र र प्रस्तुत आदेशको प्रतिलिपिसहित म्याद सूचना जारी गरी लिखित जवाफ परे वा अवधि नाँघेपछि नियमानुसार पेश गर्नू।</a:t>
             </a:r>
             <a:endParaRPr lang="en-US" dirty="0"/>
           </a:p>
@@ -3802,7 +3798,7 @@
         <p:spPr/>
         <p:txBody>
           <a:bodyPr>
-            <a:normAutofit fontScale="92500" lnSpcReduction="20000"/>
+            <a:normAutofit fontScale="92500" lnSpcReduction="10000"/>
           </a:bodyPr>
           <a:lstStyle/>
           <a:p>
@@ -3840,15 +3836,7 @@
             </a:r>
             <a:r>
               <a:rPr lang="ne-NP" dirty="0"/>
-              <a:t>आफै वा कानून बमोजिमको प्रतिनिधि मार्फत लिखित जवाफ पेश गर्नु भनी विपक्षीहरुका नाममा </a:t>
-            </a:r>
-            <a:r>
-              <a:rPr lang="ne-NP" dirty="0"/>
-              <a:t>निवेदन पत्र र प्रस्तुत आदेशको प्रतिलिपिसहित म्याद </a:t>
-            </a:r>
-            <a:r>
-              <a:rPr lang="ne-NP" dirty="0"/>
-              <a:t>सूचना जारी गरी लिखित जवाफ परे वा अवधि नाँघेपछि नियमानुसार पेश गर्नू।</a:t>
+              <a:t>आफै वा कानून बमोजिमको प्रतिनिधि मार्फत लिखित जवाफ पेश गर्नु भनी विपक्षीहरुका नाममा निवेदन पत्र र प्रस्तुत आदेशको प्रतिलिपिसहित म्याद सूचना जारी गरी लिखित जवाफ परे वा अवधि नाँघेपछि नियमानुसार पेश गर्नू।</a:t>
             </a:r>
             <a:endParaRPr lang="en-US" dirty="0"/>
           </a:p>
@@ -3923,7 +3911,7 @@
         <p:spPr/>
         <p:txBody>
           <a:bodyPr>
-            <a:normAutofit fontScale="92500" lnSpcReduction="20000"/>
+            <a:normAutofit fontScale="92500" lnSpcReduction="10000"/>
           </a:bodyPr>
           <a:lstStyle/>
           <a:p>
@@ -3961,15 +3949,7 @@
             </a:r>
             <a:r>
               <a:rPr lang="ne-NP" dirty="0"/>
-              <a:t>आफै वा कानून बमोजिमको प्रतिनिधि मार्फत लिखित जवाफ पेश गर्नु भनी विपक्षीहरुका नाममा </a:t>
-            </a:r>
-            <a:r>
-              <a:rPr lang="ne-NP" dirty="0"/>
-              <a:t>निवेदन पत्र र प्रस्तुत आदेशको प्रतिलिपिसहित म्याद </a:t>
-            </a:r>
-            <a:r>
-              <a:rPr lang="ne-NP" dirty="0"/>
-              <a:t>सूचना जारी गरी लिखित जवाफ परे वा अवधि नाँघेपछि नियमानुसार पेश </a:t>
+              <a:t>आफै वा कानून बमोजिमको प्रतिनिधि मार्फत लिखित जवाफ पेश गर्नु भनी विपक्षीहरुका नाममा निवेदन पत्र र प्रस्तुत आदेशको प्रतिलिपिसहित म्याद सूचना जारी गरी लिखित जवाफ परे वा अवधि नाँघेपछि नियमानुसार पेश </a:t>
             </a:r>
             <a:r>
               <a:rPr lang="ne-NP" dirty="0" smtClean="0"/>
@@ -4656,7 +4636,7 @@
         <p:spPr/>
         <p:txBody>
           <a:bodyPr>
-            <a:normAutofit fontScale="92500" lnSpcReduction="20000"/>
+            <a:normAutofit fontScale="92500" lnSpcReduction="10000"/>
           </a:bodyPr>
           <a:lstStyle/>
           <a:p>
@@ -4678,15 +4658,7 @@
             </a:r>
             <a:r>
               <a:rPr lang="ne-NP" dirty="0"/>
-              <a:t> आदेश जारी गर्नु नपर्ने कुनै आधार कारण भए यो आदेश प्राप्त गरेको मितिले  ।।।  दिनभित्र लिखित जवाफ पेश गर्नु भनी विपक्षीहरुका नाममा </a:t>
-            </a:r>
-            <a:r>
-              <a:rPr lang="ne-NP" dirty="0"/>
-              <a:t>निवेदन पत्र र प्रस्तुत आदेशको प्रतिलिपिसहित म्याद </a:t>
-            </a:r>
-            <a:r>
-              <a:rPr lang="ne-NP" dirty="0"/>
-              <a:t>सूचना जारी गरी लिखित जवाफ परे वा अवधि नाँघेपछि नियमानुसार पेश गर्नू</a:t>
+              <a:t> आदेश जारी गर्नु नपर्ने कुनै आधार कारण भए यो आदेश प्राप्त गरेको मितिले  ।।।  दिनभित्र लिखित जवाफ पेश गर्नु भनी विपक्षीहरुका नाममा निवेदन पत्र र प्रस्तुत आदेशको प्रतिलिपिसहित म्याद सूचना जारी गरी लिखित जवाफ परे वा अवधि नाँघेपछि नियमानुसार पेश गर्नू</a:t>
             </a:r>
             <a:r>
               <a:rPr lang="ne-NP" dirty="0" smtClean="0"/>
